--- a/AgenticAI/2-Core-Concepts/1_components_of_AI_agents.pptx
+++ b/AgenticAI/2-Core-Concepts/1_components_of_AI_agents.pptx
@@ -5,10 +5,10 @@
     <p:sldMasterId id="2147483648" r:id="rId1"/>
   </p:sldMasterIdLst>
   <p:notesMasterIdLst>
-    <p:notesMasterId r:id="rId28"/>
+    <p:notesMasterId r:id="rId29"/>
   </p:notesMasterIdLst>
   <p:handoutMasterIdLst>
-    <p:handoutMasterId r:id="rId29"/>
+    <p:handoutMasterId r:id="rId30"/>
   </p:handoutMasterIdLst>
   <p:sldIdLst>
     <p:sldId id="257" r:id="rId2"/>
@@ -20,23 +20,24 @@
     <p:sldId id="278" r:id="rId8"/>
     <p:sldId id="281" r:id="rId9"/>
     <p:sldId id="304" r:id="rId10"/>
-    <p:sldId id="298" r:id="rId11"/>
-    <p:sldId id="299" r:id="rId12"/>
-    <p:sldId id="300" r:id="rId13"/>
-    <p:sldId id="301" r:id="rId14"/>
-    <p:sldId id="302" r:id="rId15"/>
-    <p:sldId id="303" r:id="rId16"/>
-    <p:sldId id="258" r:id="rId17"/>
-    <p:sldId id="260" r:id="rId18"/>
-    <p:sldId id="277" r:id="rId19"/>
-    <p:sldId id="261" r:id="rId20"/>
-    <p:sldId id="293" r:id="rId21"/>
-    <p:sldId id="280" r:id="rId22"/>
-    <p:sldId id="295" r:id="rId23"/>
-    <p:sldId id="296" r:id="rId24"/>
-    <p:sldId id="297" r:id="rId25"/>
-    <p:sldId id="294" r:id="rId26"/>
-    <p:sldId id="279" r:id="rId27"/>
+    <p:sldId id="309" r:id="rId11"/>
+    <p:sldId id="298" r:id="rId12"/>
+    <p:sldId id="299" r:id="rId13"/>
+    <p:sldId id="300" r:id="rId14"/>
+    <p:sldId id="301" r:id="rId15"/>
+    <p:sldId id="302" r:id="rId16"/>
+    <p:sldId id="303" r:id="rId17"/>
+    <p:sldId id="258" r:id="rId18"/>
+    <p:sldId id="260" r:id="rId19"/>
+    <p:sldId id="277" r:id="rId20"/>
+    <p:sldId id="261" r:id="rId21"/>
+    <p:sldId id="293" r:id="rId22"/>
+    <p:sldId id="280" r:id="rId23"/>
+    <p:sldId id="295" r:id="rId24"/>
+    <p:sldId id="296" r:id="rId25"/>
+    <p:sldId id="297" r:id="rId26"/>
+    <p:sldId id="294" r:id="rId27"/>
+    <p:sldId id="279" r:id="rId28"/>
   </p:sldIdLst>
   <p:sldSz cx="12192000" cy="6858000"/>
   <p:notesSz cx="6858000" cy="9144000"/>
@@ -240,7 +241,7 @@
           <a:p>
             <a:fld id="{7BAEECA8-D063-486F-AE31-5020270C1449}" type="datetimeFigureOut">
               <a:rPr lang="en-US" smtClean="0"/>
-              <a:t>7/9/2026</a:t>
+              <a:t>7/13/2026</a:t>
             </a:fld>
             <a:endParaRPr lang="en-US"/>
           </a:p>
@@ -3489,7 +3490,7 @@
           <a:p>
             <a:fld id="{CB233BD1-3BA8-448D-9D08-7846095EA517}" type="datetimeFigureOut">
               <a:rPr lang="en-US" smtClean="0"/>
-              <a:t>7/9/2026</a:t>
+              <a:t>7/13/2026</a:t>
             </a:fld>
             <a:endParaRPr lang="en-US"/>
           </a:p>
@@ -3903,7 +3904,7 @@
           <a:p>
             <a:fld id="{6383FAE1-13DE-4511-8C1B-C8AFB720664C}" type="datetimeFigureOut">
               <a:rPr lang="en-US" smtClean="0"/>
-              <a:t>7/9/2026</a:t>
+              <a:t>7/13/2026</a:t>
             </a:fld>
             <a:endParaRPr lang="en-US"/>
           </a:p>
@@ -4101,7 +4102,7 @@
           <a:p>
             <a:fld id="{6383FAE1-13DE-4511-8C1B-C8AFB720664C}" type="datetimeFigureOut">
               <a:rPr lang="en-US" smtClean="0"/>
-              <a:t>7/9/2026</a:t>
+              <a:t>7/13/2026</a:t>
             </a:fld>
             <a:endParaRPr lang="en-US"/>
           </a:p>
@@ -4309,7 +4310,7 @@
           <a:p>
             <a:fld id="{6383FAE1-13DE-4511-8C1B-C8AFB720664C}" type="datetimeFigureOut">
               <a:rPr lang="en-US" smtClean="0"/>
-              <a:t>7/9/2026</a:t>
+              <a:t>7/13/2026</a:t>
             </a:fld>
             <a:endParaRPr lang="en-US"/>
           </a:p>
@@ -4507,7 +4508,7 @@
           <a:p>
             <a:fld id="{6383FAE1-13DE-4511-8C1B-C8AFB720664C}" type="datetimeFigureOut">
               <a:rPr lang="en-US" smtClean="0"/>
-              <a:t>7/9/2026</a:t>
+              <a:t>7/13/2026</a:t>
             </a:fld>
             <a:endParaRPr lang="en-US"/>
           </a:p>
@@ -4782,7 +4783,7 @@
           <a:p>
             <a:fld id="{6383FAE1-13DE-4511-8C1B-C8AFB720664C}" type="datetimeFigureOut">
               <a:rPr lang="en-US" smtClean="0"/>
-              <a:t>7/9/2026</a:t>
+              <a:t>7/13/2026</a:t>
             </a:fld>
             <a:endParaRPr lang="en-US"/>
           </a:p>
@@ -5047,7 +5048,7 @@
           <a:p>
             <a:fld id="{6383FAE1-13DE-4511-8C1B-C8AFB720664C}" type="datetimeFigureOut">
               <a:rPr lang="en-US" smtClean="0"/>
-              <a:t>7/9/2026</a:t>
+              <a:t>7/13/2026</a:t>
             </a:fld>
             <a:endParaRPr lang="en-US"/>
           </a:p>
@@ -5459,7 +5460,7 @@
           <a:p>
             <a:fld id="{6383FAE1-13DE-4511-8C1B-C8AFB720664C}" type="datetimeFigureOut">
               <a:rPr lang="en-US" smtClean="0"/>
-              <a:t>7/9/2026</a:t>
+              <a:t>7/13/2026</a:t>
             </a:fld>
             <a:endParaRPr lang="en-US"/>
           </a:p>
@@ -5600,7 +5601,7 @@
           <a:p>
             <a:fld id="{6383FAE1-13DE-4511-8C1B-C8AFB720664C}" type="datetimeFigureOut">
               <a:rPr lang="en-US" smtClean="0"/>
-              <a:t>7/9/2026</a:t>
+              <a:t>7/13/2026</a:t>
             </a:fld>
             <a:endParaRPr lang="en-US"/>
           </a:p>
@@ -5713,7 +5714,7 @@
           <a:p>
             <a:fld id="{6383FAE1-13DE-4511-8C1B-C8AFB720664C}" type="datetimeFigureOut">
               <a:rPr lang="en-US" smtClean="0"/>
-              <a:t>7/9/2026</a:t>
+              <a:t>7/13/2026</a:t>
             </a:fld>
             <a:endParaRPr lang="en-US"/>
           </a:p>
@@ -6024,7 +6025,7 @@
           <a:p>
             <a:fld id="{6383FAE1-13DE-4511-8C1B-C8AFB720664C}" type="datetimeFigureOut">
               <a:rPr lang="en-US" smtClean="0"/>
-              <a:t>7/9/2026</a:t>
+              <a:t>7/13/2026</a:t>
             </a:fld>
             <a:endParaRPr lang="en-US"/>
           </a:p>
@@ -6315,7 +6316,7 @@
           <a:p>
             <a:fld id="{6383FAE1-13DE-4511-8C1B-C8AFB720664C}" type="datetimeFigureOut">
               <a:rPr lang="en-US" smtClean="0"/>
-              <a:t>7/9/2026</a:t>
+              <a:t>7/13/2026</a:t>
             </a:fld>
             <a:endParaRPr lang="en-US"/>
           </a:p>
@@ -6559,7 +6560,7 @@
           <a:p>
             <a:fld id="{6383FAE1-13DE-4511-8C1B-C8AFB720664C}" type="datetimeFigureOut">
               <a:rPr lang="en-US" smtClean="0"/>
-              <a:t>7/9/2026</a:t>
+              <a:t>7/13/2026</a:t>
             </a:fld>
             <a:endParaRPr lang="en-US"/>
           </a:p>
@@ -7177,6 +7178,974 @@
 </file>
 
 <file path=ppt/slides/slide10.xml><?xml version="1.0" encoding="utf-8"?>
+<p:sld xmlns:a="http://schemas.openxmlformats.org/drawingml/2006/main" xmlns:r="http://schemas.openxmlformats.org/officeDocument/2006/relationships" xmlns:p="http://schemas.openxmlformats.org/presentationml/2006/main">
+  <p:cSld>
+    <p:spTree>
+      <p:nvGrpSpPr>
+        <p:cNvPr id="1" name="">
+          <a:extLst>
+            <a:ext uri="{FF2B5EF4-FFF2-40B4-BE49-F238E27FC236}">
+              <a16:creationId xmlns:a16="http://schemas.microsoft.com/office/drawing/2014/main" id="{715A8ED8-F8F6-482B-40D6-D65C0FCD06A2}"/>
+            </a:ext>
+          </a:extLst>
+        </p:cNvPr>
+        <p:cNvGrpSpPr/>
+        <p:nvPr/>
+      </p:nvGrpSpPr>
+      <p:grpSpPr>
+        <a:xfrm>
+          <a:off x="0" y="0"/>
+          <a:ext cx="0" cy="0"/>
+          <a:chOff x="0" y="0"/>
+          <a:chExt cx="0" cy="0"/>
+        </a:xfrm>
+      </p:grpSpPr>
+      <p:sp>
+        <p:nvSpPr>
+          <p:cNvPr id="6" name="TextBox 5">
+            <a:extLst>
+              <a:ext uri="{FF2B5EF4-FFF2-40B4-BE49-F238E27FC236}">
+                <a16:creationId xmlns:a16="http://schemas.microsoft.com/office/drawing/2014/main" id="{2FF58426-7DA5-0BF5-E69E-CDB1F5E1AA81}"/>
+              </a:ext>
+            </a:extLst>
+          </p:cNvPr>
+          <p:cNvSpPr txBox="1"/>
+          <p:nvPr/>
+        </p:nvSpPr>
+        <p:spPr>
+          <a:xfrm>
+            <a:off x="56704" y="504456"/>
+            <a:ext cx="11393424" cy="461665"/>
+          </a:xfrm>
+          <a:prstGeom prst="rect">
+            <a:avLst/>
+          </a:prstGeom>
+          <a:noFill/>
+        </p:spPr>
+        <p:txBody>
+          <a:bodyPr wrap="square">
+            <a:spAutoFit/>
+          </a:bodyPr>
+          <a:lstStyle/>
+          <a:p>
+            <a:pPr marL="0" indent="0">
+              <a:buNone/>
+            </a:pPr>
+            <a:r>
+              <a:rPr lang="en-US" sz="2400" dirty="0">
+                <a:solidFill>
+                  <a:schemeClr val="accent6">
+                    <a:lumMod val="60000"/>
+                    <a:lumOff val="40000"/>
+                  </a:schemeClr>
+                </a:solidFill>
+              </a:rPr>
+              <a:t>Agents share data among each other through </a:t>
+            </a:r>
+            <a:r>
+              <a:rPr lang="en-US" sz="2400" b="1" dirty="0">
+                <a:solidFill>
+                  <a:schemeClr val="accent6">
+                    <a:lumMod val="60000"/>
+                    <a:lumOff val="40000"/>
+                  </a:schemeClr>
+                </a:solidFill>
+              </a:rPr>
+              <a:t>shared state</a:t>
+            </a:r>
+          </a:p>
+        </p:txBody>
+      </p:sp>
+      <p:sp>
+        <p:nvSpPr>
+          <p:cNvPr id="4" name="TextBox 3">
+            <a:extLst>
+              <a:ext uri="{FF2B5EF4-FFF2-40B4-BE49-F238E27FC236}">
+                <a16:creationId xmlns:a16="http://schemas.microsoft.com/office/drawing/2014/main" id="{DE13B0E0-D933-7EA6-0F59-82392454A3A9}"/>
+              </a:ext>
+            </a:extLst>
+          </p:cNvPr>
+          <p:cNvSpPr txBox="1"/>
+          <p:nvPr/>
+        </p:nvSpPr>
+        <p:spPr>
+          <a:xfrm>
+            <a:off x="97016" y="5657011"/>
+            <a:ext cx="11987784" cy="830997"/>
+          </a:xfrm>
+          <a:prstGeom prst="rect">
+            <a:avLst/>
+          </a:prstGeom>
+          <a:noFill/>
+        </p:spPr>
+        <p:txBody>
+          <a:bodyPr wrap="square">
+            <a:spAutoFit/>
+          </a:bodyPr>
+          <a:lstStyle/>
+          <a:p>
+            <a:r>
+              <a:rPr lang="en-US" sz="2400" b="1" dirty="0">
+                <a:solidFill>
+                  <a:schemeClr val="accent6">
+                    <a:lumMod val="60000"/>
+                    <a:lumOff val="40000"/>
+                  </a:schemeClr>
+                </a:solidFill>
+              </a:rPr>
+              <a:t>Shared state</a:t>
+            </a:r>
+            <a:r>
+              <a:rPr lang="en-US" sz="2400" dirty="0">
+                <a:solidFill>
+                  <a:schemeClr val="accent6">
+                    <a:lumMod val="60000"/>
+                    <a:lumOff val="40000"/>
+                  </a:schemeClr>
+                </a:solidFill>
+              </a:rPr>
+              <a:t> acts as a centralized information hub or a common environment that all agents can read from and write to</a:t>
+            </a:r>
+          </a:p>
+        </p:txBody>
+      </p:sp>
+      <p:sp>
+        <p:nvSpPr>
+          <p:cNvPr id="7" name="Rectangle 6">
+            <a:extLst>
+              <a:ext uri="{FF2B5EF4-FFF2-40B4-BE49-F238E27FC236}">
+                <a16:creationId xmlns:a16="http://schemas.microsoft.com/office/drawing/2014/main" id="{9858642F-3FE3-B204-A82F-406D0765E25A}"/>
+              </a:ext>
+            </a:extLst>
+          </p:cNvPr>
+          <p:cNvSpPr/>
+          <p:nvPr/>
+        </p:nvSpPr>
+        <p:spPr>
+          <a:xfrm>
+            <a:off x="466344" y="1419157"/>
+            <a:ext cx="3703320" cy="1524768"/>
+          </a:xfrm>
+          <a:prstGeom prst="rect">
+            <a:avLst/>
+          </a:prstGeom>
+        </p:spPr>
+        <p:style>
+          <a:lnRef idx="2">
+            <a:schemeClr val="accent1">
+              <a:shade val="15000"/>
+            </a:schemeClr>
+          </a:lnRef>
+          <a:fillRef idx="1">
+            <a:schemeClr val="accent1"/>
+          </a:fillRef>
+          <a:effectRef idx="0">
+            <a:schemeClr val="accent1"/>
+          </a:effectRef>
+          <a:fontRef idx="minor">
+            <a:schemeClr val="lt1"/>
+          </a:fontRef>
+        </p:style>
+        <p:txBody>
+          <a:bodyPr rtlCol="0" anchor="t"/>
+          <a:lstStyle/>
+          <a:p>
+            <a:pPr algn="ctr"/>
+            <a:r>
+              <a:rPr lang="en-US" dirty="0"/>
+              <a:t>AI Agent 1</a:t>
+            </a:r>
+          </a:p>
+        </p:txBody>
+      </p:sp>
+      <p:sp>
+        <p:nvSpPr>
+          <p:cNvPr id="10" name="Oval 9">
+            <a:extLst>
+              <a:ext uri="{FF2B5EF4-FFF2-40B4-BE49-F238E27FC236}">
+                <a16:creationId xmlns:a16="http://schemas.microsoft.com/office/drawing/2014/main" id="{E935F1DC-015C-B10D-6BB8-115108C1D087}"/>
+              </a:ext>
+            </a:extLst>
+          </p:cNvPr>
+          <p:cNvSpPr/>
+          <p:nvPr/>
+        </p:nvSpPr>
+        <p:spPr>
+          <a:xfrm>
+            <a:off x="512030" y="2254693"/>
+            <a:ext cx="824993" cy="425014"/>
+          </a:xfrm>
+          <a:prstGeom prst="ellipse">
+            <a:avLst/>
+          </a:prstGeom>
+          <a:solidFill>
+            <a:schemeClr val="accent2">
+              <a:lumMod val="75000"/>
+            </a:schemeClr>
+          </a:solidFill>
+        </p:spPr>
+        <p:style>
+          <a:lnRef idx="2">
+            <a:schemeClr val="accent1">
+              <a:shade val="15000"/>
+            </a:schemeClr>
+          </a:lnRef>
+          <a:fillRef idx="1">
+            <a:schemeClr val="accent1"/>
+          </a:fillRef>
+          <a:effectRef idx="0">
+            <a:schemeClr val="accent1"/>
+          </a:effectRef>
+          <a:fontRef idx="minor">
+            <a:schemeClr val="lt1"/>
+          </a:fontRef>
+        </p:style>
+        <p:txBody>
+          <a:bodyPr rtlCol="0" anchor="ctr"/>
+          <a:lstStyle/>
+          <a:p>
+            <a:pPr algn="ctr"/>
+            <a:r>
+              <a:rPr lang="en-US" dirty="0"/>
+              <a:t>LLM</a:t>
+            </a:r>
+          </a:p>
+        </p:txBody>
+      </p:sp>
+      <p:sp>
+        <p:nvSpPr>
+          <p:cNvPr id="12" name="Oval 11">
+            <a:extLst>
+              <a:ext uri="{FF2B5EF4-FFF2-40B4-BE49-F238E27FC236}">
+                <a16:creationId xmlns:a16="http://schemas.microsoft.com/office/drawing/2014/main" id="{B896E69F-5B5C-4084-67D5-A5A9C7CC4999}"/>
+              </a:ext>
+            </a:extLst>
+          </p:cNvPr>
+          <p:cNvSpPr/>
+          <p:nvPr/>
+        </p:nvSpPr>
+        <p:spPr>
+          <a:xfrm>
+            <a:off x="2885046" y="2101140"/>
+            <a:ext cx="1104462" cy="732120"/>
+          </a:xfrm>
+          <a:prstGeom prst="ellipse">
+            <a:avLst/>
+          </a:prstGeom>
+          <a:solidFill>
+            <a:schemeClr val="accent2">
+              <a:lumMod val="75000"/>
+            </a:schemeClr>
+          </a:solidFill>
+        </p:spPr>
+        <p:style>
+          <a:lnRef idx="2">
+            <a:schemeClr val="accent1">
+              <a:shade val="15000"/>
+            </a:schemeClr>
+          </a:lnRef>
+          <a:fillRef idx="1">
+            <a:schemeClr val="accent1"/>
+          </a:fillRef>
+          <a:effectRef idx="0">
+            <a:schemeClr val="accent1"/>
+          </a:effectRef>
+          <a:fontRef idx="minor">
+            <a:schemeClr val="lt1"/>
+          </a:fontRef>
+        </p:style>
+        <p:txBody>
+          <a:bodyPr rtlCol="0" anchor="ctr"/>
+          <a:lstStyle/>
+          <a:p>
+            <a:pPr algn="ctr"/>
+            <a:r>
+              <a:rPr lang="en-US" dirty="0"/>
+              <a:t>Tools</a:t>
+            </a:r>
+          </a:p>
+        </p:txBody>
+      </p:sp>
+      <p:sp>
+        <p:nvSpPr>
+          <p:cNvPr id="15" name="Oval 14">
+            <a:extLst>
+              <a:ext uri="{FF2B5EF4-FFF2-40B4-BE49-F238E27FC236}">
+                <a16:creationId xmlns:a16="http://schemas.microsoft.com/office/drawing/2014/main" id="{896F3DB8-FE55-8090-841B-7611675D0635}"/>
+              </a:ext>
+            </a:extLst>
+          </p:cNvPr>
+          <p:cNvSpPr/>
+          <p:nvPr/>
+        </p:nvSpPr>
+        <p:spPr>
+          <a:xfrm>
+            <a:off x="1382709" y="2101140"/>
+            <a:ext cx="1407992" cy="732120"/>
+          </a:xfrm>
+          <a:prstGeom prst="ellipse">
+            <a:avLst/>
+          </a:prstGeom>
+          <a:solidFill>
+            <a:schemeClr val="accent2">
+              <a:lumMod val="75000"/>
+            </a:schemeClr>
+          </a:solidFill>
+        </p:spPr>
+        <p:style>
+          <a:lnRef idx="2">
+            <a:schemeClr val="accent1">
+              <a:shade val="15000"/>
+            </a:schemeClr>
+          </a:lnRef>
+          <a:fillRef idx="1">
+            <a:schemeClr val="accent1"/>
+          </a:fillRef>
+          <a:effectRef idx="0">
+            <a:schemeClr val="accent1"/>
+          </a:effectRef>
+          <a:fontRef idx="minor">
+            <a:schemeClr val="lt1"/>
+          </a:fontRef>
+        </p:style>
+        <p:txBody>
+          <a:bodyPr rtlCol="0" anchor="ctr"/>
+          <a:lstStyle/>
+          <a:p>
+            <a:pPr algn="ctr"/>
+            <a:r>
+              <a:rPr lang="en-US" dirty="0"/>
+              <a:t>Memory</a:t>
+            </a:r>
+          </a:p>
+        </p:txBody>
+      </p:sp>
+      <p:sp>
+        <p:nvSpPr>
+          <p:cNvPr id="39" name="Rectangle 38">
+            <a:extLst>
+              <a:ext uri="{FF2B5EF4-FFF2-40B4-BE49-F238E27FC236}">
+                <a16:creationId xmlns:a16="http://schemas.microsoft.com/office/drawing/2014/main" id="{B42A06D4-2424-EEF8-F7BA-31D9F4820BED}"/>
+              </a:ext>
+            </a:extLst>
+          </p:cNvPr>
+          <p:cNvSpPr/>
+          <p:nvPr/>
+        </p:nvSpPr>
+        <p:spPr>
+          <a:xfrm>
+            <a:off x="4395216" y="1419157"/>
+            <a:ext cx="3703320" cy="1524768"/>
+          </a:xfrm>
+          <a:prstGeom prst="rect">
+            <a:avLst/>
+          </a:prstGeom>
+        </p:spPr>
+        <p:style>
+          <a:lnRef idx="2">
+            <a:schemeClr val="accent1">
+              <a:shade val="15000"/>
+            </a:schemeClr>
+          </a:lnRef>
+          <a:fillRef idx="1">
+            <a:schemeClr val="accent1"/>
+          </a:fillRef>
+          <a:effectRef idx="0">
+            <a:schemeClr val="accent1"/>
+          </a:effectRef>
+          <a:fontRef idx="minor">
+            <a:schemeClr val="lt1"/>
+          </a:fontRef>
+        </p:style>
+        <p:txBody>
+          <a:bodyPr rtlCol="0" anchor="t"/>
+          <a:lstStyle/>
+          <a:p>
+            <a:pPr algn="ctr"/>
+            <a:r>
+              <a:rPr lang="en-US" dirty="0"/>
+              <a:t>AI Agent 2</a:t>
+            </a:r>
+          </a:p>
+        </p:txBody>
+      </p:sp>
+      <p:sp>
+        <p:nvSpPr>
+          <p:cNvPr id="41" name="Oval 40">
+            <a:extLst>
+              <a:ext uri="{FF2B5EF4-FFF2-40B4-BE49-F238E27FC236}">
+                <a16:creationId xmlns:a16="http://schemas.microsoft.com/office/drawing/2014/main" id="{97A7C1A3-5DFE-CC82-9041-2F52F48F1AB1}"/>
+              </a:ext>
+            </a:extLst>
+          </p:cNvPr>
+          <p:cNvSpPr/>
+          <p:nvPr/>
+        </p:nvSpPr>
+        <p:spPr>
+          <a:xfrm>
+            <a:off x="4440902" y="2254693"/>
+            <a:ext cx="824993" cy="425014"/>
+          </a:xfrm>
+          <a:prstGeom prst="ellipse">
+            <a:avLst/>
+          </a:prstGeom>
+          <a:solidFill>
+            <a:schemeClr val="accent2">
+              <a:lumMod val="75000"/>
+            </a:schemeClr>
+          </a:solidFill>
+        </p:spPr>
+        <p:style>
+          <a:lnRef idx="2">
+            <a:schemeClr val="accent1">
+              <a:shade val="15000"/>
+            </a:schemeClr>
+          </a:lnRef>
+          <a:fillRef idx="1">
+            <a:schemeClr val="accent1"/>
+          </a:fillRef>
+          <a:effectRef idx="0">
+            <a:schemeClr val="accent1"/>
+          </a:effectRef>
+          <a:fontRef idx="minor">
+            <a:schemeClr val="lt1"/>
+          </a:fontRef>
+        </p:style>
+        <p:txBody>
+          <a:bodyPr rtlCol="0" anchor="ctr"/>
+          <a:lstStyle/>
+          <a:p>
+            <a:pPr algn="ctr"/>
+            <a:r>
+              <a:rPr lang="en-US" dirty="0"/>
+              <a:t>LLM</a:t>
+            </a:r>
+          </a:p>
+        </p:txBody>
+      </p:sp>
+      <p:sp>
+        <p:nvSpPr>
+          <p:cNvPr id="43" name="Oval 42">
+            <a:extLst>
+              <a:ext uri="{FF2B5EF4-FFF2-40B4-BE49-F238E27FC236}">
+                <a16:creationId xmlns:a16="http://schemas.microsoft.com/office/drawing/2014/main" id="{B7D8AEA9-2B8A-BAC0-6B13-68BE6E1ED608}"/>
+              </a:ext>
+            </a:extLst>
+          </p:cNvPr>
+          <p:cNvSpPr/>
+          <p:nvPr/>
+        </p:nvSpPr>
+        <p:spPr>
+          <a:xfrm>
+            <a:off x="6813918" y="2101140"/>
+            <a:ext cx="1104462" cy="732120"/>
+          </a:xfrm>
+          <a:prstGeom prst="ellipse">
+            <a:avLst/>
+          </a:prstGeom>
+          <a:solidFill>
+            <a:schemeClr val="accent2">
+              <a:lumMod val="75000"/>
+            </a:schemeClr>
+          </a:solidFill>
+        </p:spPr>
+        <p:style>
+          <a:lnRef idx="2">
+            <a:schemeClr val="accent1">
+              <a:shade val="15000"/>
+            </a:schemeClr>
+          </a:lnRef>
+          <a:fillRef idx="1">
+            <a:schemeClr val="accent1"/>
+          </a:fillRef>
+          <a:effectRef idx="0">
+            <a:schemeClr val="accent1"/>
+          </a:effectRef>
+          <a:fontRef idx="minor">
+            <a:schemeClr val="lt1"/>
+          </a:fontRef>
+        </p:style>
+        <p:txBody>
+          <a:bodyPr rtlCol="0" anchor="ctr"/>
+          <a:lstStyle/>
+          <a:p>
+            <a:pPr algn="ctr"/>
+            <a:r>
+              <a:rPr lang="en-US" dirty="0"/>
+              <a:t>Tools</a:t>
+            </a:r>
+          </a:p>
+        </p:txBody>
+      </p:sp>
+      <p:sp>
+        <p:nvSpPr>
+          <p:cNvPr id="45" name="Oval 44">
+            <a:extLst>
+              <a:ext uri="{FF2B5EF4-FFF2-40B4-BE49-F238E27FC236}">
+                <a16:creationId xmlns:a16="http://schemas.microsoft.com/office/drawing/2014/main" id="{795813E3-807C-389A-A615-B577AF55B91A}"/>
+              </a:ext>
+            </a:extLst>
+          </p:cNvPr>
+          <p:cNvSpPr/>
+          <p:nvPr/>
+        </p:nvSpPr>
+        <p:spPr>
+          <a:xfrm>
+            <a:off x="5311581" y="2101140"/>
+            <a:ext cx="1407992" cy="732120"/>
+          </a:xfrm>
+          <a:prstGeom prst="ellipse">
+            <a:avLst/>
+          </a:prstGeom>
+          <a:solidFill>
+            <a:schemeClr val="accent2">
+              <a:lumMod val="75000"/>
+            </a:schemeClr>
+          </a:solidFill>
+        </p:spPr>
+        <p:style>
+          <a:lnRef idx="2">
+            <a:schemeClr val="accent1">
+              <a:shade val="15000"/>
+            </a:schemeClr>
+          </a:lnRef>
+          <a:fillRef idx="1">
+            <a:schemeClr val="accent1"/>
+          </a:fillRef>
+          <a:effectRef idx="0">
+            <a:schemeClr val="accent1"/>
+          </a:effectRef>
+          <a:fontRef idx="minor">
+            <a:schemeClr val="lt1"/>
+          </a:fontRef>
+        </p:style>
+        <p:txBody>
+          <a:bodyPr rtlCol="0" anchor="ctr"/>
+          <a:lstStyle/>
+          <a:p>
+            <a:pPr algn="ctr"/>
+            <a:r>
+              <a:rPr lang="en-US" dirty="0"/>
+              <a:t>Memory</a:t>
+            </a:r>
+          </a:p>
+        </p:txBody>
+      </p:sp>
+      <p:sp>
+        <p:nvSpPr>
+          <p:cNvPr id="47" name="Rectangle 46">
+            <a:extLst>
+              <a:ext uri="{FF2B5EF4-FFF2-40B4-BE49-F238E27FC236}">
+                <a16:creationId xmlns:a16="http://schemas.microsoft.com/office/drawing/2014/main" id="{AD58422A-7208-AD43-E345-CC096E2E96D5}"/>
+              </a:ext>
+            </a:extLst>
+          </p:cNvPr>
+          <p:cNvSpPr/>
+          <p:nvPr/>
+        </p:nvSpPr>
+        <p:spPr>
+          <a:xfrm>
+            <a:off x="8400288" y="1419157"/>
+            <a:ext cx="3703320" cy="1524768"/>
+          </a:xfrm>
+          <a:prstGeom prst="rect">
+            <a:avLst/>
+          </a:prstGeom>
+        </p:spPr>
+        <p:style>
+          <a:lnRef idx="2">
+            <a:schemeClr val="accent1">
+              <a:shade val="15000"/>
+            </a:schemeClr>
+          </a:lnRef>
+          <a:fillRef idx="1">
+            <a:schemeClr val="accent1"/>
+          </a:fillRef>
+          <a:effectRef idx="0">
+            <a:schemeClr val="accent1"/>
+          </a:effectRef>
+          <a:fontRef idx="minor">
+            <a:schemeClr val="lt1"/>
+          </a:fontRef>
+        </p:style>
+        <p:txBody>
+          <a:bodyPr rtlCol="0" anchor="t"/>
+          <a:lstStyle/>
+          <a:p>
+            <a:pPr algn="ctr"/>
+            <a:r>
+              <a:rPr lang="en-US" dirty="0"/>
+              <a:t>AI Agent 3</a:t>
+            </a:r>
+          </a:p>
+        </p:txBody>
+      </p:sp>
+      <p:sp>
+        <p:nvSpPr>
+          <p:cNvPr id="49" name="Oval 48">
+            <a:extLst>
+              <a:ext uri="{FF2B5EF4-FFF2-40B4-BE49-F238E27FC236}">
+                <a16:creationId xmlns:a16="http://schemas.microsoft.com/office/drawing/2014/main" id="{C46555FD-A887-AB0B-940E-C096CF41BEC5}"/>
+              </a:ext>
+            </a:extLst>
+          </p:cNvPr>
+          <p:cNvSpPr/>
+          <p:nvPr/>
+        </p:nvSpPr>
+        <p:spPr>
+          <a:xfrm>
+            <a:off x="8445974" y="2254693"/>
+            <a:ext cx="824993" cy="425014"/>
+          </a:xfrm>
+          <a:prstGeom prst="ellipse">
+            <a:avLst/>
+          </a:prstGeom>
+          <a:solidFill>
+            <a:schemeClr val="accent2">
+              <a:lumMod val="75000"/>
+            </a:schemeClr>
+          </a:solidFill>
+        </p:spPr>
+        <p:style>
+          <a:lnRef idx="2">
+            <a:schemeClr val="accent1">
+              <a:shade val="15000"/>
+            </a:schemeClr>
+          </a:lnRef>
+          <a:fillRef idx="1">
+            <a:schemeClr val="accent1"/>
+          </a:fillRef>
+          <a:effectRef idx="0">
+            <a:schemeClr val="accent1"/>
+          </a:effectRef>
+          <a:fontRef idx="minor">
+            <a:schemeClr val="lt1"/>
+          </a:fontRef>
+        </p:style>
+        <p:txBody>
+          <a:bodyPr rtlCol="0" anchor="ctr"/>
+          <a:lstStyle/>
+          <a:p>
+            <a:pPr algn="ctr"/>
+            <a:r>
+              <a:rPr lang="en-US" dirty="0"/>
+              <a:t>LLM</a:t>
+            </a:r>
+          </a:p>
+        </p:txBody>
+      </p:sp>
+      <p:sp>
+        <p:nvSpPr>
+          <p:cNvPr id="51" name="Oval 50">
+            <a:extLst>
+              <a:ext uri="{FF2B5EF4-FFF2-40B4-BE49-F238E27FC236}">
+                <a16:creationId xmlns:a16="http://schemas.microsoft.com/office/drawing/2014/main" id="{C11BCDA7-D9B3-6354-229C-E8B9D9590798}"/>
+              </a:ext>
+            </a:extLst>
+          </p:cNvPr>
+          <p:cNvSpPr/>
+          <p:nvPr/>
+        </p:nvSpPr>
+        <p:spPr>
+          <a:xfrm>
+            <a:off x="10818990" y="2101140"/>
+            <a:ext cx="1104462" cy="732120"/>
+          </a:xfrm>
+          <a:prstGeom prst="ellipse">
+            <a:avLst/>
+          </a:prstGeom>
+          <a:solidFill>
+            <a:schemeClr val="accent2">
+              <a:lumMod val="75000"/>
+            </a:schemeClr>
+          </a:solidFill>
+        </p:spPr>
+        <p:style>
+          <a:lnRef idx="2">
+            <a:schemeClr val="accent1">
+              <a:shade val="15000"/>
+            </a:schemeClr>
+          </a:lnRef>
+          <a:fillRef idx="1">
+            <a:schemeClr val="accent1"/>
+          </a:fillRef>
+          <a:effectRef idx="0">
+            <a:schemeClr val="accent1"/>
+          </a:effectRef>
+          <a:fontRef idx="minor">
+            <a:schemeClr val="lt1"/>
+          </a:fontRef>
+        </p:style>
+        <p:txBody>
+          <a:bodyPr rtlCol="0" anchor="ctr"/>
+          <a:lstStyle/>
+          <a:p>
+            <a:pPr algn="ctr"/>
+            <a:r>
+              <a:rPr lang="en-US" dirty="0"/>
+              <a:t>Tools</a:t>
+            </a:r>
+          </a:p>
+        </p:txBody>
+      </p:sp>
+      <p:sp>
+        <p:nvSpPr>
+          <p:cNvPr id="53" name="Oval 52">
+            <a:extLst>
+              <a:ext uri="{FF2B5EF4-FFF2-40B4-BE49-F238E27FC236}">
+                <a16:creationId xmlns:a16="http://schemas.microsoft.com/office/drawing/2014/main" id="{49C3903D-3202-6F6B-2183-488C739D6F74}"/>
+              </a:ext>
+            </a:extLst>
+          </p:cNvPr>
+          <p:cNvSpPr/>
+          <p:nvPr/>
+        </p:nvSpPr>
+        <p:spPr>
+          <a:xfrm>
+            <a:off x="9316653" y="2101140"/>
+            <a:ext cx="1407992" cy="732120"/>
+          </a:xfrm>
+          <a:prstGeom prst="ellipse">
+            <a:avLst/>
+          </a:prstGeom>
+          <a:solidFill>
+            <a:schemeClr val="accent2">
+              <a:lumMod val="75000"/>
+            </a:schemeClr>
+          </a:solidFill>
+        </p:spPr>
+        <p:style>
+          <a:lnRef idx="2">
+            <a:schemeClr val="accent1">
+              <a:shade val="15000"/>
+            </a:schemeClr>
+          </a:lnRef>
+          <a:fillRef idx="1">
+            <a:schemeClr val="accent1"/>
+          </a:fillRef>
+          <a:effectRef idx="0">
+            <a:schemeClr val="accent1"/>
+          </a:effectRef>
+          <a:fontRef idx="minor">
+            <a:schemeClr val="lt1"/>
+          </a:fontRef>
+        </p:style>
+        <p:txBody>
+          <a:bodyPr rtlCol="0" anchor="ctr"/>
+          <a:lstStyle/>
+          <a:p>
+            <a:pPr algn="ctr"/>
+            <a:r>
+              <a:rPr lang="en-US" dirty="0"/>
+              <a:t>Memory</a:t>
+            </a:r>
+          </a:p>
+        </p:txBody>
+      </p:sp>
+      <p:sp>
+        <p:nvSpPr>
+          <p:cNvPr id="54" name="Rectangle 53">
+            <a:extLst>
+              <a:ext uri="{FF2B5EF4-FFF2-40B4-BE49-F238E27FC236}">
+                <a16:creationId xmlns:a16="http://schemas.microsoft.com/office/drawing/2014/main" id="{50EF6914-9316-DE9F-0515-CB82E0C908F0}"/>
+              </a:ext>
+            </a:extLst>
+          </p:cNvPr>
+          <p:cNvSpPr/>
+          <p:nvPr/>
+        </p:nvSpPr>
+        <p:spPr>
+          <a:xfrm>
+            <a:off x="996696" y="3429000"/>
+            <a:ext cx="10570464" cy="1216152"/>
+          </a:xfrm>
+          <a:prstGeom prst="rect">
+            <a:avLst/>
+          </a:prstGeom>
+          <a:solidFill>
+            <a:srgbClr val="00B050"/>
+          </a:solidFill>
+        </p:spPr>
+        <p:style>
+          <a:lnRef idx="2">
+            <a:schemeClr val="accent1">
+              <a:shade val="15000"/>
+            </a:schemeClr>
+          </a:lnRef>
+          <a:fillRef idx="1">
+            <a:schemeClr val="accent1"/>
+          </a:fillRef>
+          <a:effectRef idx="0">
+            <a:schemeClr val="accent1"/>
+          </a:effectRef>
+          <a:fontRef idx="minor">
+            <a:schemeClr val="lt1"/>
+          </a:fontRef>
+        </p:style>
+        <p:txBody>
+          <a:bodyPr rtlCol="0" anchor="ctr"/>
+          <a:lstStyle/>
+          <a:p>
+            <a:pPr algn="ctr"/>
+            <a:r>
+              <a:rPr lang="en-US" dirty="0"/>
+              <a:t>Shared State </a:t>
+            </a:r>
+          </a:p>
+        </p:txBody>
+      </p:sp>
+      <p:sp>
+        <p:nvSpPr>
+          <p:cNvPr id="55" name="Arrow: Down 54">
+            <a:extLst>
+              <a:ext uri="{FF2B5EF4-FFF2-40B4-BE49-F238E27FC236}">
+                <a16:creationId xmlns:a16="http://schemas.microsoft.com/office/drawing/2014/main" id="{A8684D47-8D52-8AE9-91B7-E890C19D8AAC}"/>
+              </a:ext>
+            </a:extLst>
+          </p:cNvPr>
+          <p:cNvSpPr/>
+          <p:nvPr/>
+        </p:nvSpPr>
+        <p:spPr>
+          <a:xfrm>
+            <a:off x="2514600" y="3090672"/>
+            <a:ext cx="276101" cy="306289"/>
+          </a:xfrm>
+          <a:prstGeom prst="downArrow">
+            <a:avLst/>
+          </a:prstGeom>
+        </p:spPr>
+        <p:style>
+          <a:lnRef idx="2">
+            <a:schemeClr val="accent1">
+              <a:shade val="15000"/>
+            </a:schemeClr>
+          </a:lnRef>
+          <a:fillRef idx="1">
+            <a:schemeClr val="accent1"/>
+          </a:fillRef>
+          <a:effectRef idx="0">
+            <a:schemeClr val="accent1"/>
+          </a:effectRef>
+          <a:fontRef idx="minor">
+            <a:schemeClr val="lt1"/>
+          </a:fontRef>
+        </p:style>
+        <p:txBody>
+          <a:bodyPr rtlCol="0" anchor="ctr"/>
+          <a:lstStyle/>
+          <a:p>
+            <a:pPr algn="ctr"/>
+            <a:endParaRPr lang="en-US"/>
+          </a:p>
+        </p:txBody>
+      </p:sp>
+      <p:sp>
+        <p:nvSpPr>
+          <p:cNvPr id="57" name="Arrow: Down 56">
+            <a:extLst>
+              <a:ext uri="{FF2B5EF4-FFF2-40B4-BE49-F238E27FC236}">
+                <a16:creationId xmlns:a16="http://schemas.microsoft.com/office/drawing/2014/main" id="{987E70E9-87B6-4C4B-B254-CDB0EB951AB3}"/>
+              </a:ext>
+            </a:extLst>
+          </p:cNvPr>
+          <p:cNvSpPr/>
+          <p:nvPr/>
+        </p:nvSpPr>
+        <p:spPr>
+          <a:xfrm>
+            <a:off x="5952858" y="3033318"/>
+            <a:ext cx="276101" cy="306289"/>
+          </a:xfrm>
+          <a:prstGeom prst="downArrow">
+            <a:avLst/>
+          </a:prstGeom>
+        </p:spPr>
+        <p:style>
+          <a:lnRef idx="2">
+            <a:schemeClr val="accent1">
+              <a:shade val="15000"/>
+            </a:schemeClr>
+          </a:lnRef>
+          <a:fillRef idx="1">
+            <a:schemeClr val="accent1"/>
+          </a:fillRef>
+          <a:effectRef idx="0">
+            <a:schemeClr val="accent1"/>
+          </a:effectRef>
+          <a:fontRef idx="minor">
+            <a:schemeClr val="lt1"/>
+          </a:fontRef>
+        </p:style>
+        <p:txBody>
+          <a:bodyPr rtlCol="0" anchor="ctr"/>
+          <a:lstStyle/>
+          <a:p>
+            <a:pPr algn="ctr"/>
+            <a:endParaRPr lang="en-US"/>
+          </a:p>
+        </p:txBody>
+      </p:sp>
+      <p:sp>
+        <p:nvSpPr>
+          <p:cNvPr id="59" name="Arrow: Down 58">
+            <a:extLst>
+              <a:ext uri="{FF2B5EF4-FFF2-40B4-BE49-F238E27FC236}">
+                <a16:creationId xmlns:a16="http://schemas.microsoft.com/office/drawing/2014/main" id="{C2E46A66-AA30-4101-0AAF-CD3A47FA722F}"/>
+              </a:ext>
+            </a:extLst>
+          </p:cNvPr>
+          <p:cNvSpPr/>
+          <p:nvPr/>
+        </p:nvSpPr>
+        <p:spPr>
+          <a:xfrm>
+            <a:off x="9401299" y="3078014"/>
+            <a:ext cx="276101" cy="306289"/>
+          </a:xfrm>
+          <a:prstGeom prst="downArrow">
+            <a:avLst/>
+          </a:prstGeom>
+        </p:spPr>
+        <p:style>
+          <a:lnRef idx="2">
+            <a:schemeClr val="accent1">
+              <a:shade val="15000"/>
+            </a:schemeClr>
+          </a:lnRef>
+          <a:fillRef idx="1">
+            <a:schemeClr val="accent1"/>
+          </a:fillRef>
+          <a:effectRef idx="0">
+            <a:schemeClr val="accent1"/>
+          </a:effectRef>
+          <a:fontRef idx="minor">
+            <a:schemeClr val="lt1"/>
+          </a:fontRef>
+        </p:style>
+        <p:txBody>
+          <a:bodyPr rtlCol="0" anchor="ctr"/>
+          <a:lstStyle/>
+          <a:p>
+            <a:pPr algn="ctr"/>
+            <a:endParaRPr lang="en-US"/>
+          </a:p>
+        </p:txBody>
+      </p:sp>
+    </p:spTree>
+    <p:extLst>
+      <p:ext uri="{BB962C8B-B14F-4D97-AF65-F5344CB8AC3E}">
+        <p14:creationId xmlns:p14="http://schemas.microsoft.com/office/powerpoint/2010/main" val="3307051751"/>
+      </p:ext>
+    </p:extLst>
+  </p:cSld>
+  <p:clrMapOvr>
+    <a:masterClrMapping/>
+  </p:clrMapOvr>
+</p:sld>
+</file>
+
+<file path=ppt/slides/slide11.xml><?xml version="1.0" encoding="utf-8"?>
 <p:sld xmlns:a="http://schemas.openxmlformats.org/drawingml/2006/main" xmlns:r="http://schemas.openxmlformats.org/officeDocument/2006/relationships" xmlns:p="http://schemas.openxmlformats.org/presentationml/2006/main">
   <p:cSld>
     <p:spTree>
@@ -7839,7 +8808,7 @@
 </p:sld>
 </file>
 
-<file path=ppt/slides/slide11.xml><?xml version="1.0" encoding="utf-8"?>
+<file path=ppt/slides/slide12.xml><?xml version="1.0" encoding="utf-8"?>
 <p:sld xmlns:a="http://schemas.openxmlformats.org/drawingml/2006/main" xmlns:r="http://schemas.openxmlformats.org/officeDocument/2006/relationships" xmlns:p="http://schemas.openxmlformats.org/presentationml/2006/main">
   <p:cSld>
     <p:spTree>
@@ -7953,7 +8922,7 @@
 </p:sld>
 </file>
 
-<file path=ppt/slides/slide12.xml><?xml version="1.0" encoding="utf-8"?>
+<file path=ppt/slides/slide13.xml><?xml version="1.0" encoding="utf-8"?>
 <p:sld xmlns:a="http://schemas.openxmlformats.org/drawingml/2006/main" xmlns:r="http://schemas.openxmlformats.org/officeDocument/2006/relationships" xmlns:p="http://schemas.openxmlformats.org/presentationml/2006/main">
   <p:cSld>
     <p:spTree>
@@ -8249,7 +9218,7 @@
 </p:sld>
 </file>
 
-<file path=ppt/slides/slide13.xml><?xml version="1.0" encoding="utf-8"?>
+<file path=ppt/slides/slide14.xml><?xml version="1.0" encoding="utf-8"?>
 <p:sld xmlns:a="http://schemas.openxmlformats.org/drawingml/2006/main" xmlns:r="http://schemas.openxmlformats.org/officeDocument/2006/relationships" xmlns:p="http://schemas.openxmlformats.org/presentationml/2006/main">
   <p:cSld>
     <p:spTree>
@@ -8557,7 +9526,7 @@
 </p:sld>
 </file>
 
-<file path=ppt/slides/slide14.xml><?xml version="1.0" encoding="utf-8"?>
+<file path=ppt/slides/slide15.xml><?xml version="1.0" encoding="utf-8"?>
 <p:sld xmlns:a="http://schemas.openxmlformats.org/drawingml/2006/main" xmlns:r="http://schemas.openxmlformats.org/officeDocument/2006/relationships" xmlns:p="http://schemas.openxmlformats.org/presentationml/2006/main">
   <p:cSld>
     <p:spTree>
@@ -8915,7 +9884,7 @@
 </p:sld>
 </file>
 
-<file path=ppt/slides/slide15.xml><?xml version="1.0" encoding="utf-8"?>
+<file path=ppt/slides/slide16.xml><?xml version="1.0" encoding="utf-8"?>
 <p:sld xmlns:a="http://schemas.openxmlformats.org/drawingml/2006/main" xmlns:r="http://schemas.openxmlformats.org/officeDocument/2006/relationships" xmlns:p="http://schemas.openxmlformats.org/presentationml/2006/main">
   <p:cSld>
     <p:spTree>
@@ -9208,7 +10177,7 @@
 </p:sld>
 </file>
 
-<file path=ppt/slides/slide16.xml><?xml version="1.0" encoding="utf-8"?>
+<file path=ppt/slides/slide17.xml><?xml version="1.0" encoding="utf-8"?>
 <p:sld xmlns:a="http://schemas.openxmlformats.org/drawingml/2006/main" xmlns:r="http://schemas.openxmlformats.org/officeDocument/2006/relationships" xmlns:p="http://schemas.openxmlformats.org/presentationml/2006/main">
   <p:cSld>
     <p:spTree>
@@ -9819,7 +10788,7 @@
 </p:sld>
 </file>
 
-<file path=ppt/slides/slide17.xml><?xml version="1.0" encoding="utf-8"?>
+<file path=ppt/slides/slide18.xml><?xml version="1.0" encoding="utf-8"?>
 <p:sld xmlns:a="http://schemas.openxmlformats.org/drawingml/2006/main" xmlns:r="http://schemas.openxmlformats.org/officeDocument/2006/relationships" xmlns:p="http://schemas.openxmlformats.org/presentationml/2006/main">
   <p:cSld>
     <p:spTree>
@@ -11983,7 +12952,7 @@
 </p:sld>
 </file>
 
-<file path=ppt/slides/slide18.xml><?xml version="1.0" encoding="utf-8"?>
+<file path=ppt/slides/slide19.xml><?xml version="1.0" encoding="utf-8"?>
 <p:sld xmlns:a="http://schemas.openxmlformats.org/drawingml/2006/main" xmlns:r="http://schemas.openxmlformats.org/officeDocument/2006/relationships" xmlns:p="http://schemas.openxmlformats.org/presentationml/2006/main">
   <p:cSld>
     <p:spTree>
@@ -12330,240 +13299,6 @@
     <p:extLst>
       <p:ext uri="{BB962C8B-B14F-4D97-AF65-F5344CB8AC3E}">
         <p14:creationId xmlns:p14="http://schemas.microsoft.com/office/powerpoint/2010/main" val="3659367048"/>
-      </p:ext>
-    </p:extLst>
-  </p:cSld>
-  <p:clrMapOvr>
-    <a:masterClrMapping/>
-  </p:clrMapOvr>
-</p:sld>
-</file>
-
-<file path=ppt/slides/slide19.xml><?xml version="1.0" encoding="utf-8"?>
-<p:sld xmlns:a="http://schemas.openxmlformats.org/drawingml/2006/main" xmlns:r="http://schemas.openxmlformats.org/officeDocument/2006/relationships" xmlns:p="http://schemas.openxmlformats.org/presentationml/2006/main">
-  <p:cSld>
-    <p:spTree>
-      <p:nvGrpSpPr>
-        <p:cNvPr id="1" name=""/>
-        <p:cNvGrpSpPr/>
-        <p:nvPr/>
-      </p:nvGrpSpPr>
-      <p:grpSpPr>
-        <a:xfrm>
-          <a:off x="0" y="0"/>
-          <a:ext cx="0" cy="0"/>
-          <a:chOff x="0" y="0"/>
-          <a:chExt cx="0" cy="0"/>
-        </a:xfrm>
-      </p:grpSpPr>
-      <p:sp>
-        <p:nvSpPr>
-          <p:cNvPr id="5" name="TextBox 4">
-            <a:extLst>
-              <a:ext uri="{FF2B5EF4-FFF2-40B4-BE49-F238E27FC236}">
-                <a16:creationId xmlns:a16="http://schemas.microsoft.com/office/drawing/2014/main" id="{62929B61-02FA-BAD8-A1E7-BE3CD876C3E4}"/>
-              </a:ext>
-            </a:extLst>
-          </p:cNvPr>
-          <p:cNvSpPr txBox="1"/>
-          <p:nvPr/>
-        </p:nvSpPr>
-        <p:spPr>
-          <a:xfrm>
-            <a:off x="224028" y="238400"/>
-            <a:ext cx="6190488" cy="523220"/>
-          </a:xfrm>
-          <a:prstGeom prst="rect">
-            <a:avLst/>
-          </a:prstGeom>
-          <a:noFill/>
-        </p:spPr>
-        <p:txBody>
-          <a:bodyPr wrap="square">
-            <a:spAutoFit/>
-          </a:bodyPr>
-          <a:lstStyle/>
-          <a:p>
-            <a:r>
-              <a:rPr lang="en-US" sz="2800" b="1" dirty="0">
-                <a:solidFill>
-                  <a:schemeClr val="accent6">
-                    <a:lumMod val="60000"/>
-                    <a:lumOff val="40000"/>
-                  </a:schemeClr>
-                </a:solidFill>
-              </a:rPr>
-              <a:t>Some examples of AI Agent</a:t>
-            </a:r>
-          </a:p>
-        </p:txBody>
-      </p:sp>
-      <p:sp>
-        <p:nvSpPr>
-          <p:cNvPr id="7" name="TextBox 6">
-            <a:extLst>
-              <a:ext uri="{FF2B5EF4-FFF2-40B4-BE49-F238E27FC236}">
-                <a16:creationId xmlns:a16="http://schemas.microsoft.com/office/drawing/2014/main" id="{460B5396-FECC-1BC6-952B-AF8504B12ABF}"/>
-              </a:ext>
-            </a:extLst>
-          </p:cNvPr>
-          <p:cNvSpPr txBox="1"/>
-          <p:nvPr/>
-        </p:nvSpPr>
-        <p:spPr>
-          <a:xfrm>
-            <a:off x="224028" y="761620"/>
-            <a:ext cx="11722608" cy="5262979"/>
-          </a:xfrm>
-          <a:prstGeom prst="rect">
-            <a:avLst/>
-          </a:prstGeom>
-          <a:noFill/>
-        </p:spPr>
-        <p:txBody>
-          <a:bodyPr wrap="square">
-            <a:spAutoFit/>
-          </a:bodyPr>
-          <a:lstStyle/>
-          <a:p>
-            <a:pPr marL="0" indent="0">
-              <a:buNone/>
-            </a:pPr>
-            <a:r>
-              <a:rPr lang="en-US" sz="2400" b="1" dirty="0">
-                <a:solidFill>
-                  <a:schemeClr val="accent6">
-                    <a:lumMod val="60000"/>
-                    <a:lumOff val="40000"/>
-                  </a:schemeClr>
-                </a:solidFill>
-              </a:rPr>
-              <a:t>Simple tasks</a:t>
-            </a:r>
-          </a:p>
-          <a:p>
-            <a:endParaRPr lang="en-US" sz="2400" dirty="0">
-              <a:solidFill>
-                <a:schemeClr val="accent6">
-                  <a:lumMod val="60000"/>
-                  <a:lumOff val="40000"/>
-                </a:schemeClr>
-              </a:solidFill>
-            </a:endParaRPr>
-          </a:p>
-          <a:p>
-            <a:pPr marL="342900" indent="-342900">
-              <a:buFont typeface="Arial" panose="020B0604020202020204" pitchFamily="34" charset="0"/>
-              <a:buChar char="•"/>
-            </a:pPr>
-            <a:r>
-              <a:rPr lang="en-US" sz="2400" dirty="0">
-                <a:solidFill>
-                  <a:schemeClr val="accent6">
-                    <a:lumMod val="60000"/>
-                    <a:lumOff val="40000"/>
-                  </a:schemeClr>
-                </a:solidFill>
-              </a:rPr>
-              <a:t>A customer says "I was charged twice for my Netflix subscription." An agent checks the transaction history, identifies the duplicate, calls the refund API, sends a confirmation, and logs the case — without human involvement. It escalates to a human </a:t>
-            </a:r>
-            <a:r>
-              <a:rPr lang="en-US" sz="2400" i="1" dirty="0">
-                <a:solidFill>
-                  <a:schemeClr val="accent6">
-                    <a:lumMod val="60000"/>
-                    <a:lumOff val="40000"/>
-                  </a:schemeClr>
-                </a:solidFill>
-              </a:rPr>
-              <a:t>only</a:t>
-            </a:r>
-            <a:r>
-              <a:rPr lang="en-US" sz="2400" dirty="0">
-                <a:solidFill>
-                  <a:schemeClr val="accent6">
-                    <a:lumMod val="60000"/>
-                    <a:lumOff val="40000"/>
-                  </a:schemeClr>
-                </a:solidFill>
-              </a:rPr>
-              <a:t> if the situation is genuinely ambiguous or the customer is distressed.</a:t>
-            </a:r>
-          </a:p>
-          <a:p>
-            <a:endParaRPr lang="en-US" sz="2400" dirty="0">
-              <a:solidFill>
-                <a:schemeClr val="accent6">
-                  <a:lumMod val="60000"/>
-                  <a:lumOff val="40000"/>
-                </a:schemeClr>
-              </a:solidFill>
-            </a:endParaRPr>
-          </a:p>
-          <a:p>
-            <a:pPr marL="342900" indent="-342900">
-              <a:buFont typeface="Arial" panose="020B0604020202020204" pitchFamily="34" charset="0"/>
-              <a:buChar char="•"/>
-            </a:pPr>
-            <a:r>
-              <a:rPr lang="en-US" sz="2400" dirty="0">
-                <a:solidFill>
-                  <a:schemeClr val="accent6">
-                    <a:lumMod val="60000"/>
-                    <a:lumOff val="40000"/>
-                  </a:schemeClr>
-                </a:solidFill>
-              </a:rPr>
-              <a:t>Agent that could help me review my emails and create tasks on a digital to-do list based on the highest priority emails coming in.</a:t>
-            </a:r>
-          </a:p>
-          <a:p>
-            <a:pPr marL="342900" indent="-342900">
-              <a:buFont typeface="Arial" panose="020B0604020202020204" pitchFamily="34" charset="0"/>
-              <a:buChar char="•"/>
-            </a:pPr>
-            <a:endParaRPr lang="en-US" sz="2400" dirty="0">
-              <a:solidFill>
-                <a:schemeClr val="accent6">
-                  <a:lumMod val="60000"/>
-                  <a:lumOff val="40000"/>
-                </a:schemeClr>
-              </a:solidFill>
-            </a:endParaRPr>
-          </a:p>
-          <a:p>
-            <a:pPr marL="342900" indent="-342900">
-              <a:buFont typeface="Arial" panose="020B0604020202020204" pitchFamily="34" charset="0"/>
-              <a:buChar char="•"/>
-            </a:pPr>
-            <a:r>
-              <a:rPr lang="en-US" sz="2400" dirty="0">
-                <a:solidFill>
-                  <a:schemeClr val="accent6">
-                    <a:lumMod val="60000"/>
-                    <a:lumOff val="40000"/>
-                  </a:schemeClr>
-                </a:solidFill>
-              </a:rPr>
-              <a:t>Agent that could respond to people reporting bugs and automatically gather missing information and seek clarification on confusing parts of a bug report and then route the bug to the appropriate team to resolve.</a:t>
-            </a:r>
-          </a:p>
-          <a:p>
-            <a:endParaRPr lang="en-US" sz="2400" dirty="0">
-              <a:solidFill>
-                <a:schemeClr val="accent6">
-                  <a:lumMod val="60000"/>
-                  <a:lumOff val="40000"/>
-                </a:schemeClr>
-              </a:solidFill>
-            </a:endParaRPr>
-          </a:p>
-        </p:txBody>
-      </p:sp>
-    </p:spTree>
-    <p:extLst>
-      <p:ext uri="{BB962C8B-B14F-4D97-AF65-F5344CB8AC3E}">
-        <p14:creationId xmlns:p14="http://schemas.microsoft.com/office/powerpoint/2010/main" val="1596415014"/>
       </p:ext>
     </p:extLst>
   </p:cSld>
@@ -13024,6 +13759,240 @@
   <p:cSld>
     <p:spTree>
       <p:nvGrpSpPr>
+        <p:cNvPr id="1" name=""/>
+        <p:cNvGrpSpPr/>
+        <p:nvPr/>
+      </p:nvGrpSpPr>
+      <p:grpSpPr>
+        <a:xfrm>
+          <a:off x="0" y="0"/>
+          <a:ext cx="0" cy="0"/>
+          <a:chOff x="0" y="0"/>
+          <a:chExt cx="0" cy="0"/>
+        </a:xfrm>
+      </p:grpSpPr>
+      <p:sp>
+        <p:nvSpPr>
+          <p:cNvPr id="5" name="TextBox 4">
+            <a:extLst>
+              <a:ext uri="{FF2B5EF4-FFF2-40B4-BE49-F238E27FC236}">
+                <a16:creationId xmlns:a16="http://schemas.microsoft.com/office/drawing/2014/main" id="{62929B61-02FA-BAD8-A1E7-BE3CD876C3E4}"/>
+              </a:ext>
+            </a:extLst>
+          </p:cNvPr>
+          <p:cNvSpPr txBox="1"/>
+          <p:nvPr/>
+        </p:nvSpPr>
+        <p:spPr>
+          <a:xfrm>
+            <a:off x="224028" y="238400"/>
+            <a:ext cx="6190488" cy="523220"/>
+          </a:xfrm>
+          <a:prstGeom prst="rect">
+            <a:avLst/>
+          </a:prstGeom>
+          <a:noFill/>
+        </p:spPr>
+        <p:txBody>
+          <a:bodyPr wrap="square">
+            <a:spAutoFit/>
+          </a:bodyPr>
+          <a:lstStyle/>
+          <a:p>
+            <a:r>
+              <a:rPr lang="en-US" sz="2800" b="1" dirty="0">
+                <a:solidFill>
+                  <a:schemeClr val="accent6">
+                    <a:lumMod val="60000"/>
+                    <a:lumOff val="40000"/>
+                  </a:schemeClr>
+                </a:solidFill>
+              </a:rPr>
+              <a:t>Some examples of AI Agent</a:t>
+            </a:r>
+          </a:p>
+        </p:txBody>
+      </p:sp>
+      <p:sp>
+        <p:nvSpPr>
+          <p:cNvPr id="7" name="TextBox 6">
+            <a:extLst>
+              <a:ext uri="{FF2B5EF4-FFF2-40B4-BE49-F238E27FC236}">
+                <a16:creationId xmlns:a16="http://schemas.microsoft.com/office/drawing/2014/main" id="{460B5396-FECC-1BC6-952B-AF8504B12ABF}"/>
+              </a:ext>
+            </a:extLst>
+          </p:cNvPr>
+          <p:cNvSpPr txBox="1"/>
+          <p:nvPr/>
+        </p:nvSpPr>
+        <p:spPr>
+          <a:xfrm>
+            <a:off x="224028" y="761620"/>
+            <a:ext cx="11722608" cy="5262979"/>
+          </a:xfrm>
+          <a:prstGeom prst="rect">
+            <a:avLst/>
+          </a:prstGeom>
+          <a:noFill/>
+        </p:spPr>
+        <p:txBody>
+          <a:bodyPr wrap="square">
+            <a:spAutoFit/>
+          </a:bodyPr>
+          <a:lstStyle/>
+          <a:p>
+            <a:pPr marL="0" indent="0">
+              <a:buNone/>
+            </a:pPr>
+            <a:r>
+              <a:rPr lang="en-US" sz="2400" b="1" dirty="0">
+                <a:solidFill>
+                  <a:schemeClr val="accent6">
+                    <a:lumMod val="60000"/>
+                    <a:lumOff val="40000"/>
+                  </a:schemeClr>
+                </a:solidFill>
+              </a:rPr>
+              <a:t>Simple tasks</a:t>
+            </a:r>
+          </a:p>
+          <a:p>
+            <a:endParaRPr lang="en-US" sz="2400" dirty="0">
+              <a:solidFill>
+                <a:schemeClr val="accent6">
+                  <a:lumMod val="60000"/>
+                  <a:lumOff val="40000"/>
+                </a:schemeClr>
+              </a:solidFill>
+            </a:endParaRPr>
+          </a:p>
+          <a:p>
+            <a:pPr marL="342900" indent="-342900">
+              <a:buFont typeface="Arial" panose="020B0604020202020204" pitchFamily="34" charset="0"/>
+              <a:buChar char="•"/>
+            </a:pPr>
+            <a:r>
+              <a:rPr lang="en-US" sz="2400" dirty="0">
+                <a:solidFill>
+                  <a:schemeClr val="accent6">
+                    <a:lumMod val="60000"/>
+                    <a:lumOff val="40000"/>
+                  </a:schemeClr>
+                </a:solidFill>
+              </a:rPr>
+              <a:t>A customer says "I was charged twice for my Netflix subscription." An agent checks the transaction history, identifies the duplicate, calls the refund API, sends a confirmation, and logs the case — without human involvement. It escalates to a human </a:t>
+            </a:r>
+            <a:r>
+              <a:rPr lang="en-US" sz="2400" i="1" dirty="0">
+                <a:solidFill>
+                  <a:schemeClr val="accent6">
+                    <a:lumMod val="60000"/>
+                    <a:lumOff val="40000"/>
+                  </a:schemeClr>
+                </a:solidFill>
+              </a:rPr>
+              <a:t>only</a:t>
+            </a:r>
+            <a:r>
+              <a:rPr lang="en-US" sz="2400" dirty="0">
+                <a:solidFill>
+                  <a:schemeClr val="accent6">
+                    <a:lumMod val="60000"/>
+                    <a:lumOff val="40000"/>
+                  </a:schemeClr>
+                </a:solidFill>
+              </a:rPr>
+              <a:t> if the situation is genuinely ambiguous or the customer is distressed.</a:t>
+            </a:r>
+          </a:p>
+          <a:p>
+            <a:endParaRPr lang="en-US" sz="2400" dirty="0">
+              <a:solidFill>
+                <a:schemeClr val="accent6">
+                  <a:lumMod val="60000"/>
+                  <a:lumOff val="40000"/>
+                </a:schemeClr>
+              </a:solidFill>
+            </a:endParaRPr>
+          </a:p>
+          <a:p>
+            <a:pPr marL="342900" indent="-342900">
+              <a:buFont typeface="Arial" panose="020B0604020202020204" pitchFamily="34" charset="0"/>
+              <a:buChar char="•"/>
+            </a:pPr>
+            <a:r>
+              <a:rPr lang="en-US" sz="2400" dirty="0">
+                <a:solidFill>
+                  <a:schemeClr val="accent6">
+                    <a:lumMod val="60000"/>
+                    <a:lumOff val="40000"/>
+                  </a:schemeClr>
+                </a:solidFill>
+              </a:rPr>
+              <a:t>Agent that could help me review my emails and create tasks on a digital to-do list based on the highest priority emails coming in.</a:t>
+            </a:r>
+          </a:p>
+          <a:p>
+            <a:pPr marL="342900" indent="-342900">
+              <a:buFont typeface="Arial" panose="020B0604020202020204" pitchFamily="34" charset="0"/>
+              <a:buChar char="•"/>
+            </a:pPr>
+            <a:endParaRPr lang="en-US" sz="2400" dirty="0">
+              <a:solidFill>
+                <a:schemeClr val="accent6">
+                  <a:lumMod val="60000"/>
+                  <a:lumOff val="40000"/>
+                </a:schemeClr>
+              </a:solidFill>
+            </a:endParaRPr>
+          </a:p>
+          <a:p>
+            <a:pPr marL="342900" indent="-342900">
+              <a:buFont typeface="Arial" panose="020B0604020202020204" pitchFamily="34" charset="0"/>
+              <a:buChar char="•"/>
+            </a:pPr>
+            <a:r>
+              <a:rPr lang="en-US" sz="2400" dirty="0">
+                <a:solidFill>
+                  <a:schemeClr val="accent6">
+                    <a:lumMod val="60000"/>
+                    <a:lumOff val="40000"/>
+                  </a:schemeClr>
+                </a:solidFill>
+              </a:rPr>
+              <a:t>Agent that could respond to people reporting bugs and automatically gather missing information and seek clarification on confusing parts of a bug report and then route the bug to the appropriate team to resolve.</a:t>
+            </a:r>
+          </a:p>
+          <a:p>
+            <a:endParaRPr lang="en-US" sz="2400" dirty="0">
+              <a:solidFill>
+                <a:schemeClr val="accent6">
+                  <a:lumMod val="60000"/>
+                  <a:lumOff val="40000"/>
+                </a:schemeClr>
+              </a:solidFill>
+            </a:endParaRPr>
+          </a:p>
+        </p:txBody>
+      </p:sp>
+    </p:spTree>
+    <p:extLst>
+      <p:ext uri="{BB962C8B-B14F-4D97-AF65-F5344CB8AC3E}">
+        <p14:creationId xmlns:p14="http://schemas.microsoft.com/office/powerpoint/2010/main" val="1596415014"/>
+      </p:ext>
+    </p:extLst>
+  </p:cSld>
+  <p:clrMapOvr>
+    <a:masterClrMapping/>
+  </p:clrMapOvr>
+</p:sld>
+</file>
+
+<file path=ppt/slides/slide21.xml><?xml version="1.0" encoding="utf-8"?>
+<p:sld xmlns:a="http://schemas.openxmlformats.org/drawingml/2006/main" xmlns:r="http://schemas.openxmlformats.org/officeDocument/2006/relationships" xmlns:p="http://schemas.openxmlformats.org/presentationml/2006/main">
+  <p:cSld>
+    <p:spTree>
+      <p:nvGrpSpPr>
         <p:cNvPr id="1" name="">
           <a:extLst>
             <a:ext uri="{FF2B5EF4-FFF2-40B4-BE49-F238E27FC236}">
@@ -13217,7 +14186,7 @@
 </p:sld>
 </file>
 
-<file path=ppt/slides/slide21.xml><?xml version="1.0" encoding="utf-8"?>
+<file path=ppt/slides/slide22.xml><?xml version="1.0" encoding="utf-8"?>
 <p:sld xmlns:a="http://schemas.openxmlformats.org/drawingml/2006/main" xmlns:r="http://schemas.openxmlformats.org/officeDocument/2006/relationships" xmlns:p="http://schemas.openxmlformats.org/presentationml/2006/main">
   <p:cSld>
     <p:spTree>
@@ -13524,7 +14493,7 @@
 </p:sld>
 </file>
 
-<file path=ppt/slides/slide22.xml><?xml version="1.0" encoding="utf-8"?>
+<file path=ppt/slides/slide23.xml><?xml version="1.0" encoding="utf-8"?>
 <p:sld xmlns:a="http://schemas.openxmlformats.org/drawingml/2006/main" xmlns:r="http://schemas.openxmlformats.org/officeDocument/2006/relationships" xmlns:p="http://schemas.openxmlformats.org/presentationml/2006/main">
   <p:cSld>
     <p:spTree>
@@ -13778,7 +14747,7 @@
 </p:sld>
 </file>
 
-<file path=ppt/slides/slide23.xml><?xml version="1.0" encoding="utf-8"?>
+<file path=ppt/slides/slide24.xml><?xml version="1.0" encoding="utf-8"?>
 <p:sld xmlns:a="http://schemas.openxmlformats.org/drawingml/2006/main" xmlns:r="http://schemas.openxmlformats.org/officeDocument/2006/relationships" xmlns:p="http://schemas.openxmlformats.org/presentationml/2006/main">
   <p:cSld>
     <p:spTree>
@@ -14002,7 +14971,7 @@
 </p:sld>
 </file>
 
-<file path=ppt/slides/slide24.xml><?xml version="1.0" encoding="utf-8"?>
+<file path=ppt/slides/slide25.xml><?xml version="1.0" encoding="utf-8"?>
 <p:sld xmlns:a="http://schemas.openxmlformats.org/drawingml/2006/main" xmlns:r="http://schemas.openxmlformats.org/officeDocument/2006/relationships" xmlns:p="http://schemas.openxmlformats.org/presentationml/2006/main">
   <p:cSld>
     <p:spTree>
@@ -14251,7 +15220,7 @@
 </p:sld>
 </file>
 
-<file path=ppt/slides/slide25.xml><?xml version="1.0" encoding="utf-8"?>
+<file path=ppt/slides/slide26.xml><?xml version="1.0" encoding="utf-8"?>
 <p:sld xmlns:a="http://schemas.openxmlformats.org/drawingml/2006/main" xmlns:r="http://schemas.openxmlformats.org/officeDocument/2006/relationships" xmlns:p="http://schemas.openxmlformats.org/presentationml/2006/main">
   <p:cSld>
     <p:spTree>
@@ -14414,7 +15383,7 @@
 </p:sld>
 </file>
 
-<file path=ppt/slides/slide26.xml><?xml version="1.0" encoding="utf-8"?>
+<file path=ppt/slides/slide27.xml><?xml version="1.0" encoding="utf-8"?>
 <p:sld xmlns:a="http://schemas.openxmlformats.org/drawingml/2006/main" xmlns:r="http://schemas.openxmlformats.org/officeDocument/2006/relationships" xmlns:p="http://schemas.openxmlformats.org/presentationml/2006/main">
   <p:cSld>
     <p:spTree>
